--- a/week-06/presentations/ppts/day-01-stakeholder-mapping.pptx
+++ b/week-06/presentations/ppts/day-01-stakeholder-mapping.pptx
@@ -1448,7 +1448,7 @@
             </a:pPr>
             <a:r>
               <a:rPr/>
-              <a:t>By 16:00, every triad has SEP §1.</a:t>
+              <a:t>By 16:00, every triad has SEP Section 1.</a:t>
             </a:r>
           </a:p>
         </p:txBody>
@@ -2022,7 +2022,7 @@
             </a:pPr>
             <a:r>
               <a:rPr/>
-              <a:t>Same discipline as the TCD §6 sign-off matrix.</a:t>
+              <a:t>Same discipline as the TCD Section 6 sign-off matrix.</a:t>
             </a:r>
           </a:p>
         </p:txBody>
@@ -5992,16 +5992,16 @@
             </a:pPr>
             <a:r>
               <a:rPr/>
-              <a:t>Architecture — TCD §1 + key trade-offs</a:t>
-            </a:r>
-          </a:p>
-          <a:p>
-            <a:pPr lvl="0" indent="0" marL="0">
-              <a:buNone/>
-            </a:pPr>
-            <a:r>
-              <a:rPr/>
-              <a:t>SLO targets — TCD §4</a:t>
+              <a:t>Architecture — TCD Section 1 + key trade-offs</a:t>
+            </a:r>
+          </a:p>
+          <a:p>
+            <a:pPr lvl="0" indent="0" marL="0">
+              <a:buNone/>
+            </a:pPr>
+            <a:r>
+              <a:rPr/>
+              <a:t>SLO targets — TCD Section 4</a:t>
             </a:r>
           </a:p>
           <a:p>
@@ -6849,7 +6849,7 @@
             </a:pPr>
             <a:r>
               <a:rPr/>
-              <a:t>🧿 Day 1 AI Prompt</a:t>
+              <a:t>🤖 Day 1 AI Prompt</a:t>
             </a:r>
           </a:p>
         </p:txBody>
@@ -6933,7 +6933,7 @@
             </a:pPr>
             <a:r>
               <a:rPr/>
-              <a:t>15 min: polish §1</a:t>
+              <a:t>15 min: polish Section 1</a:t>
             </a:r>
           </a:p>
           <a:p>
@@ -6951,7 +6951,7 @@
             </a:pPr>
             <a:r>
               <a:rPr/>
-              <a:t>5 min: cross-check vs TCD §6</a:t>
+              <a:t>5 min: cross-check vs TCD Section 6</a:t>
             </a:r>
           </a:p>
           <a:p>
@@ -7086,7 +7086,7 @@
             </a:pPr>
             <a:r>
               <a:rPr/>
-              <a:t>SEP §1 drafted</a:t>
+              <a:t>SEP Section 1 drafted</a:t>
             </a:r>
           </a:p>
           <a:p>
@@ -7131,7 +7131,7 @@
             </a:pPr>
             <a:r>
               <a:rPr/>
-              <a:t>Bring to Day 2: SEP §1. Tomorrow we plan the actual engagement.</a:t>
+              <a:t>Bring to Day 2: SEP Section 1. Tomorrow we plan the actual engagement.</a:t>
             </a:r>
           </a:p>
         </p:txBody>
@@ -7314,7 +7314,7 @@
             </a:pPr>
             <a:r>
               <a:rPr/>
-              <a:t>Draft SEP §1 — the input to engagement planning tomorrow</a:t>
+              <a:t>Draft SEP Section 1 — the input to engagement planning tomorrow</a:t>
             </a:r>
           </a:p>
         </p:txBody>
@@ -7431,7 +7431,7 @@
             </a:pPr>
             <a:r>
               <a:rPr/>
-              <a:t>Pin TCD §6 sign-off matrix on the wall</a:t>
+              <a:t>Pin TCD Section 6 sign-off matrix on the wall</a:t>
             </a:r>
           </a:p>
           <a:p>
@@ -7539,7 +7539,7 @@
             </a:pPr>
             <a:r>
               <a:rPr/>
-              <a:t>Watch list + SEP §1 polish</a:t>
+              <a:t>Watch list + SEP Section 1 polish</a:t>
             </a:r>
           </a:p>
         </p:txBody>
@@ -7914,7 +7914,7 @@
             </a:pPr>
             <a:r>
               <a:rPr/>
-              <a:t>5 min: copy from TCD §6</a:t>
+              <a:t>5 min: copy from TCD Section 6</a:t>
             </a:r>
           </a:p>
           <a:p>

--- a/week-06/presentations/ppts/day-01-stakeholder-mapping.pptx
+++ b/week-06/presentations/ppts/day-01-stakeholder-mapping.pptx
@@ -6001,7 +6001,7 @@
             </a:pPr>
             <a:r>
               <a:rPr/>
-              <a:t>SLO targets — TCD Section 4</a:t>
+              <a:t>Service Level Objective (SLO) targets — TCD Section 4</a:t>
             </a:r>
           </a:p>
           <a:p>
@@ -6019,7 +6019,7 @@
             </a:pPr>
             <a:r>
               <a:rPr/>
-              <a:t>OOS backlog ownership — deferred items + owners</a:t>
+              <a:t>Out-of-scope (OOS) backlog ownership — deferred items + owners</a:t>
             </a:r>
           </a:p>
           <a:p>
@@ -7296,7 +7296,7 @@
             </a:pPr>
             <a:r>
               <a:rPr/>
-              <a:t>Assign RACI to the 5 most consequential decisions, with one A per decision</a:t>
+              <a:t>Assign a RACI matrix (Responsible, Accountable, Consulted, Informed) to the 5 most consequential decisions, with one A per decision</a:t>
             </a:r>
           </a:p>
           <a:p>
@@ -7314,7 +7314,7 @@
             </a:pPr>
             <a:r>
               <a:rPr/>
-              <a:t>Draft SEP Section 1 — the input to engagement planning tomorrow</a:t>
+              <a:t>Draft Stakeholder Engagement Plan (SEP) Section 1 — the input to engagement planning tomorrow</a:t>
             </a:r>
           </a:p>
         </p:txBody>
@@ -7914,7 +7914,7 @@
             </a:pPr>
             <a:r>
               <a:rPr/>
-              <a:t>5 min: copy from TCD Section 6</a:t>
+              <a:t>5 min: copy from Technical Concept Document (TCD) Section 6</a:t>
             </a:r>
           </a:p>
           <a:p>

--- a/week-06/presentations/ppts/day-01-stakeholder-mapping.pptx
+++ b/week-06/presentations/ppts/day-01-stakeholder-mapping.pptx
@@ -5504,6 +5504,27 @@
           <a:bodyPr/>
           <a:lstStyle/>
           <a:p>
+            <a:pPr lvl="0" indent="0">
+              <a:buNone/>
+            </a:pPr>
+            <a:r>
+              <a:rPr>
+                <a:latin typeface="Courier"/>
+              </a:rPr>
+              <a:t>High-Interest, High-Power: Eng Lead
+Customer Success Lead
+QA Lead
+High-Interest, Low-Power:   Other dispatcher squads
+Internal users testing
+Low-Interest, High-Power:   Architect
+Eng Director
+Security Lead
+CFO
+Low-Interest, Low-Power:    Internal communications
+Ops floor</a:t>
+            </a:r>
+          </a:p>
+          <a:p>
             <a:pPr lvl="0" indent="0" marL="0">
               <a:buNone/>
             </a:pPr>
@@ -6850,6 +6871,42 @@
             <a:r>
               <a:rPr/>
               <a:t>🤖 Day 1 AI Prompt</a:t>
+            </a:r>
+          </a:p>
+        </p:txBody>
+      </p:sp>
+      <p:sp>
+        <p:nvSpPr>
+          <p:cNvPr id="3" name="Content Placeholder 2"/>
+          <p:cNvSpPr>
+            <a:spLocks noGrp="1"/>
+          </p:cNvSpPr>
+          <p:nvPr>
+            <p:ph idx="1"/>
+          </p:nvPr>
+        </p:nvSpPr>
+        <p:spPr/>
+        <p:txBody>
+          <a:bodyPr/>
+          <a:lstStyle/>
+          <a:p>
+            <a:pPr lvl="0" indent="0">
+              <a:buNone/>
+            </a:pPr>
+            <a:r>
+              <a:rPr>
+                <a:latin typeface="Courier"/>
+              </a:rPr>
+              <a:t>Role: Senior PM coaching a junior TPM on stakeholder management.
+Context: &lt;stakeholder list with quadrants and RACI&gt;
+Task: Identify 3 likely blind spots:
+1. A stakeholder who probably has more power than the map shows
+2. A decision where the A is wrong or absent
+3. A high-power-low-interest stakeholder whose trigger isn't named
+Constraints:
+- Be specific to names and roles given
+- Do not invent stakeholders
+Format: 3 numbered findings, each with one-sentence rationale.</a:t>
             </a:r>
           </a:p>
         </p:txBody>

--- a/week-06/presentations/ppts/day-01-stakeholder-mapping.pptx
+++ b/week-06/presentations/ppts/day-01-stakeholder-mapping.pptx
@@ -1448,7 +1448,7 @@
             </a:pPr>
             <a:r>
               <a:rPr/>
-              <a:t>By 16:00, every triad has SEP Section 1.</a:t>
+              <a:t>By 16:00, every quad has SEP Section 1.</a:t>
             </a:r>
           </a:p>
         </p:txBody>
@@ -1694,7 +1694,7 @@
             </a:pPr>
             <a:r>
               <a:rPr/>
-              <a:t>Open the floor. Encourage triads to share one stakeholder whose placement on the map surprised them today.</a:t>
+              <a:t>Open the floor. Encourage quads to share one stakeholder whose placement on the map surprised them today.</a:t>
             </a:r>
           </a:p>
         </p:txBody>
@@ -1858,7 +1858,7 @@
             </a:pPr>
             <a:r>
               <a:rPr/>
-              <a:t>Frame Block 1: a complete stakeholder list is the foundation for every later step. Push triads to think beyond the org chart.</a:t>
+              <a:t>Frame Block 1: a complete stakeholder list is the foundation for every later step. Push quads to think beyond the org chart.</a:t>
             </a:r>
           </a:p>
         </p:txBody>
@@ -1940,7 +1940,7 @@
             </a:pPr>
             <a:r>
               <a:rPr/>
-              <a:t>Push triads through all five circles. The omissions are usually compliance and finance.</a:t>
+              <a:t>Push quads through all five circles. The omissions are usually compliance and finance.</a:t>
             </a:r>
           </a:p>
         </p:txBody>
@@ -5605,7 +5605,7 @@
             </a:pPr>
             <a:r>
               <a:rPr b="1"/>
-              <a:t>Triads • 40 minutes</a:t>
+              <a:t>Quads • 40 minutes</a:t>
             </a:r>
           </a:p>
           <a:p>
@@ -6457,7 +6457,7 @@
             </a:pPr>
             <a:r>
               <a:rPr b="1"/>
-              <a:t>Triads • 40 minutes</a:t>
+              <a:t>Quads • 40 minutes</a:t>
             </a:r>
           </a:p>
           <a:p>
@@ -6981,7 +6981,7 @@
             </a:pPr>
             <a:r>
               <a:rPr b="1"/>
-              <a:t>Triads • 45 minutes • Wrap</a:t>
+              <a:t>Quads • 45 minutes • Wrap</a:t>
             </a:r>
           </a:p>
           <a:p>
@@ -7962,7 +7962,7 @@
             </a:pPr>
             <a:r>
               <a:rPr b="1"/>
-              <a:t>Triads • 35 minutes</a:t>
+              <a:t>Quads • 35 minutes</a:t>
             </a:r>
           </a:p>
           <a:p>

--- a/week-06/presentations/ppts/day-01-stakeholder-mapping.pptx
+++ b/week-06/presentations/ppts/day-01-stakeholder-mapping.pptx
@@ -5605,7 +5605,7 @@
             </a:pPr>
             <a:r>
               <a:rPr b="1"/>
-              <a:t>Quads • 40 minutes</a:t>
+              <a:t>Quads • 50 minutes</a:t>
             </a:r>
           </a:p>
           <a:p>
@@ -6457,7 +6457,7 @@
             </a:pPr>
             <a:r>
               <a:rPr b="1"/>
-              <a:t>Quads • 40 minutes</a:t>
+              <a:t>Quads • 50 minutes</a:t>
             </a:r>
           </a:p>
           <a:p>
@@ -6981,7 +6981,7 @@
             </a:pPr>
             <a:r>
               <a:rPr b="1"/>
-              <a:t>Quads • 45 minutes • Wrap</a:t>
+              <a:t>Quads • 55 minutes • Wrap</a:t>
             </a:r>
           </a:p>
           <a:p>
@@ -7962,7 +7962,7 @@
             </a:pPr>
             <a:r>
               <a:rPr b="1"/>
-              <a:t>Quads • 35 minutes</a:t>
+              <a:t>Quads • 45 minutes</a:t>
             </a:r>
           </a:p>
           <a:p>

--- a/week-06/presentations/ppts/day-01-stakeholder-mapping.pptx
+++ b/week-06/presentations/ppts/day-01-stakeholder-mapping.pptx
@@ -5623,7 +5623,7 @@
             </a:pPr>
             <a:r>
               <a:rPr/>
-              <a:t>15 min: place each stakeholder; argue when you disagree</a:t>
+              <a:t>25 min: place each stakeholder; argue when you disagree</a:t>
             </a:r>
           </a:p>
           <a:p>
@@ -5650,7 +5650,7 @@
             </a:pPr>
             <a:r>
               <a:rPr/>
-              <a:t>⏱ 5 + 15 + 10 + 10</a:t>
+              <a:t>⏱ 5 + 25 + 10 + 10</a:t>
             </a:r>
           </a:p>
         </p:txBody>
@@ -6466,7 +6466,7 @@
             </a:pPr>
             <a:r>
               <a:rPr/>
-              <a:t>20 min: draft matrix</a:t>
+              <a:t>30 min: draft matrix</a:t>
             </a:r>
           </a:p>
           <a:p>
@@ -6502,7 +6502,7 @@
             </a:pPr>
             <a:r>
               <a:rPr/>
-              <a:t>⏱ 20 + 5 + 10 + 5</a:t>
+              <a:t>⏱ 30 + 5 + 10 + 5</a:t>
             </a:r>
           </a:p>
         </p:txBody>
@@ -6999,7 +6999,7 @@
             </a:pPr>
             <a:r>
               <a:rPr/>
-              <a:t>20 min: build watch list (3–5 stakeholders + triggers)</a:t>
+              <a:t>30 min: build watch list (3–5 stakeholders + triggers)</a:t>
             </a:r>
           </a:p>
           <a:p>
@@ -7026,7 +7026,7 @@
             </a:pPr>
             <a:r>
               <a:rPr/>
-              <a:t>⏱ 15 + 20 + 5 + 5 · 15-min wrap</a:t>
+              <a:t>⏱ 15 + 30 + 5 + 5 · 15-min wrap</a:t>
             </a:r>
           </a:p>
         </p:txBody>
@@ -7980,7 +7980,7 @@
             </a:pPr>
             <a:r>
               <a:rPr/>
-              <a:t>15 min: walk the 5 circles, augment</a:t>
+              <a:t>25 min: walk the 5 circles, augment</a:t>
             </a:r>
           </a:p>
           <a:p>
@@ -8007,7 +8007,7 @@
             </a:pPr>
             <a:r>
               <a:rPr/>
-              <a:t>⏱ 5 + 15 + 5 + 10</a:t>
+              <a:t>⏱ 5 + 25 + 5 + 10</a:t>
             </a:r>
           </a:p>
         </p:txBody>
